--- a/Jobportal.pptx
+++ b/Jobportal.pptx
@@ -5,15 +5,19 @@
     <p:sldMasterId id="2147483648" r:id="rId1"/>
   </p:sldMasterIdLst>
   <p:sldIdLst>
-    <p:sldId id="256" r:id="rId2"/>
-    <p:sldId id="258" r:id="rId3"/>
-    <p:sldId id="259" r:id="rId4"/>
-    <p:sldId id="260" r:id="rId5"/>
-    <p:sldId id="261" r:id="rId6"/>
-    <p:sldId id="262" r:id="rId7"/>
-    <p:sldId id="263" r:id="rId8"/>
-    <p:sldId id="264" r:id="rId9"/>
-    <p:sldId id="265" r:id="rId10"/>
+    <p:sldId id="258" r:id="rId2"/>
+    <p:sldId id="259" r:id="rId3"/>
+    <p:sldId id="260" r:id="rId4"/>
+    <p:sldId id="261" r:id="rId5"/>
+    <p:sldId id="262" r:id="rId6"/>
+    <p:sldId id="263" r:id="rId7"/>
+    <p:sldId id="264" r:id="rId8"/>
+    <p:sldId id="265" r:id="rId9"/>
+    <p:sldId id="266" r:id="rId10"/>
+    <p:sldId id="267" r:id="rId11"/>
+    <p:sldId id="268" r:id="rId12"/>
+    <p:sldId id="269" r:id="rId13"/>
+    <p:sldId id="270" r:id="rId14"/>
   </p:sldIdLst>
   <p:sldSz cx="12192000" cy="6858000"/>
   <p:notesSz cx="6858000" cy="9144000"/>
@@ -112,6 +116,11 @@
       </a:defRPr>
     </a:lvl9pPr>
   </p:defaultTextStyle>
+  <p:extLst>
+    <p:ext uri="{EFAFB233-063F-42B5-8137-9DF3F51BA10A}">
+      <p15:sldGuideLst xmlns:p15="http://schemas.microsoft.com/office/powerpoint/2012/main"/>
+    </p:ext>
+  </p:extLst>
 </p:presentation>
 </file>
 
@@ -246,7 +255,7 @@
           <a:p>
             <a:fld id="{7C7E371C-DE5F-474D-BD81-10E7991018FD}" type="datetimeFigureOut">
               <a:rPr lang="en-US" smtClean="0"/>
-              <a:t>11/5/2025</a:t>
+              <a:t>11/7/2025</a:t>
             </a:fld>
             <a:endParaRPr lang="en-US"/>
           </a:p>
@@ -416,7 +425,7 @@
           <a:p>
             <a:fld id="{7C7E371C-DE5F-474D-BD81-10E7991018FD}" type="datetimeFigureOut">
               <a:rPr lang="en-US" smtClean="0"/>
-              <a:t>11/5/2025</a:t>
+              <a:t>11/7/2025</a:t>
             </a:fld>
             <a:endParaRPr lang="en-US"/>
           </a:p>
@@ -596,7 +605,7 @@
           <a:p>
             <a:fld id="{7C7E371C-DE5F-474D-BD81-10E7991018FD}" type="datetimeFigureOut">
               <a:rPr lang="en-US" smtClean="0"/>
-              <a:t>11/5/2025</a:t>
+              <a:t>11/7/2025</a:t>
             </a:fld>
             <a:endParaRPr lang="en-US"/>
           </a:p>
@@ -766,7 +775,7 @@
           <a:p>
             <a:fld id="{7C7E371C-DE5F-474D-BD81-10E7991018FD}" type="datetimeFigureOut">
               <a:rPr lang="en-US" smtClean="0"/>
-              <a:t>11/5/2025</a:t>
+              <a:t>11/7/2025</a:t>
             </a:fld>
             <a:endParaRPr lang="en-US"/>
           </a:p>
@@ -1012,7 +1021,7 @@
           <a:p>
             <a:fld id="{7C7E371C-DE5F-474D-BD81-10E7991018FD}" type="datetimeFigureOut">
               <a:rPr lang="en-US" smtClean="0"/>
-              <a:t>11/5/2025</a:t>
+              <a:t>11/7/2025</a:t>
             </a:fld>
             <a:endParaRPr lang="en-US"/>
           </a:p>
@@ -1244,7 +1253,7 @@
           <a:p>
             <a:fld id="{7C7E371C-DE5F-474D-BD81-10E7991018FD}" type="datetimeFigureOut">
               <a:rPr lang="en-US" smtClean="0"/>
-              <a:t>11/5/2025</a:t>
+              <a:t>11/7/2025</a:t>
             </a:fld>
             <a:endParaRPr lang="en-US"/>
           </a:p>
@@ -1611,7 +1620,7 @@
           <a:p>
             <a:fld id="{7C7E371C-DE5F-474D-BD81-10E7991018FD}" type="datetimeFigureOut">
               <a:rPr lang="en-US" smtClean="0"/>
-              <a:t>11/5/2025</a:t>
+              <a:t>11/7/2025</a:t>
             </a:fld>
             <a:endParaRPr lang="en-US"/>
           </a:p>
@@ -1729,7 +1738,7 @@
           <a:p>
             <a:fld id="{7C7E371C-DE5F-474D-BD81-10E7991018FD}" type="datetimeFigureOut">
               <a:rPr lang="en-US" smtClean="0"/>
-              <a:t>11/5/2025</a:t>
+              <a:t>11/7/2025</a:t>
             </a:fld>
             <a:endParaRPr lang="en-US"/>
           </a:p>
@@ -1824,7 +1833,7 @@
           <a:p>
             <a:fld id="{7C7E371C-DE5F-474D-BD81-10E7991018FD}" type="datetimeFigureOut">
               <a:rPr lang="en-US" smtClean="0"/>
-              <a:t>11/5/2025</a:t>
+              <a:t>11/7/2025</a:t>
             </a:fld>
             <a:endParaRPr lang="en-US"/>
           </a:p>
@@ -2101,7 +2110,7 @@
           <a:p>
             <a:fld id="{7C7E371C-DE5F-474D-BD81-10E7991018FD}" type="datetimeFigureOut">
               <a:rPr lang="en-US" smtClean="0"/>
-              <a:t>11/5/2025</a:t>
+              <a:t>11/7/2025</a:t>
             </a:fld>
             <a:endParaRPr lang="en-US"/>
           </a:p>
@@ -2354,7 +2363,7 @@
           <a:p>
             <a:fld id="{7C7E371C-DE5F-474D-BD81-10E7991018FD}" type="datetimeFigureOut">
               <a:rPr lang="en-US" smtClean="0"/>
-              <a:t>11/5/2025</a:t>
+              <a:t>11/7/2025</a:t>
             </a:fld>
             <a:endParaRPr lang="en-US"/>
           </a:p>
@@ -2567,7 +2576,7 @@
           <a:p>
             <a:fld id="{7C7E371C-DE5F-474D-BD81-10E7991018FD}" type="datetimeFigureOut">
               <a:rPr lang="en-US" smtClean="0"/>
-              <a:t>11/5/2025</a:t>
+              <a:t>11/7/2025</a:t>
             </a:fld>
             <a:endParaRPr lang="en-US"/>
           </a:p>
@@ -2979,74 +2988,6 @@
             <a:spLocks noGrp="1"/>
           </p:cNvSpPr>
           <p:nvPr>
-            <p:ph type="ctrTitle"/>
-          </p:nvPr>
-        </p:nvSpPr>
-        <p:spPr/>
-        <p:txBody>
-          <a:bodyPr/>
-          <a:lstStyle/>
-          <a:p>
-            <a:endParaRPr lang="en-US"/>
-          </a:p>
-        </p:txBody>
-      </p:sp>
-      <p:sp>
-        <p:nvSpPr>
-          <p:cNvPr id="3" name="Subtitle 2"/>
-          <p:cNvSpPr>
-            <a:spLocks noGrp="1"/>
-          </p:cNvSpPr>
-          <p:nvPr>
-            <p:ph type="subTitle" idx="1"/>
-          </p:nvPr>
-        </p:nvSpPr>
-        <p:spPr/>
-        <p:txBody>
-          <a:bodyPr/>
-          <a:lstStyle/>
-          <a:p>
-            <a:endParaRPr lang="en-US"/>
-          </a:p>
-        </p:txBody>
-      </p:sp>
-    </p:spTree>
-    <p:extLst>
-      <p:ext uri="{BB962C8B-B14F-4D97-AF65-F5344CB8AC3E}">
-        <p14:creationId xmlns:p14="http://schemas.microsoft.com/office/powerpoint/2010/main" val="303570608"/>
-      </p:ext>
-    </p:extLst>
-  </p:cSld>
-  <p:clrMapOvr>
-    <a:masterClrMapping/>
-  </p:clrMapOvr>
-</p:sld>
-</file>
-
-<file path=ppt/slides/slide2.xml><?xml version="1.0" encoding="utf-8"?>
-<p:sld xmlns:a="http://schemas.openxmlformats.org/drawingml/2006/main" xmlns:r="http://schemas.openxmlformats.org/officeDocument/2006/relationships" xmlns:p="http://schemas.openxmlformats.org/presentationml/2006/main">
-  <p:cSld>
-    <p:spTree>
-      <p:nvGrpSpPr>
-        <p:cNvPr id="1" name=""/>
-        <p:cNvGrpSpPr/>
-        <p:nvPr/>
-      </p:nvGrpSpPr>
-      <p:grpSpPr>
-        <a:xfrm>
-          <a:off x="0" y="0"/>
-          <a:ext cx="0" cy="0"/>
-          <a:chOff x="0" y="0"/>
-          <a:chExt cx="0" cy="0"/>
-        </a:xfrm>
-      </p:grpSpPr>
-      <p:sp>
-        <p:nvSpPr>
-          <p:cNvPr id="2" name="Title 1"/>
-          <p:cNvSpPr>
-            <a:spLocks noGrp="1"/>
-          </p:cNvSpPr>
-          <p:nvPr>
             <p:ph type="title"/>
           </p:nvPr>
         </p:nvSpPr>
@@ -3107,7 +3048,555 @@
 </p:sld>
 </file>
 
-<file path=ppt/slides/slide3.xml><?xml version="1.0" encoding="utf-8"?>
+<file path=ppt/slides/slide10.xml><?xml version="1.0" encoding="utf-8"?>
+<p:sld xmlns:a="http://schemas.openxmlformats.org/drawingml/2006/main" xmlns:r="http://schemas.openxmlformats.org/officeDocument/2006/relationships" xmlns:p="http://schemas.openxmlformats.org/presentationml/2006/main">
+  <p:cSld>
+    <p:spTree>
+      <p:nvGrpSpPr>
+        <p:cNvPr id="1" name=""/>
+        <p:cNvGrpSpPr/>
+        <p:nvPr/>
+      </p:nvGrpSpPr>
+      <p:grpSpPr>
+        <a:xfrm>
+          <a:off x="0" y="0"/>
+          <a:ext cx="0" cy="0"/>
+          <a:chOff x="0" y="0"/>
+          <a:chExt cx="0" cy="0"/>
+        </a:xfrm>
+      </p:grpSpPr>
+      <p:sp>
+        <p:nvSpPr>
+          <p:cNvPr id="2" name="Title 1"/>
+          <p:cNvSpPr>
+            <a:spLocks noGrp="1"/>
+          </p:cNvSpPr>
+          <p:nvPr>
+            <p:ph type="title"/>
+          </p:nvPr>
+        </p:nvSpPr>
+        <p:spPr/>
+        <p:txBody>
+          <a:bodyPr/>
+          <a:lstStyle/>
+          <a:p>
+            <a:r>
+              <a:rPr lang="en-US" dirty="0" smtClean="0"/>
+              <a:t>After User Login</a:t>
+            </a:r>
+            <a:endParaRPr lang="en-US" dirty="0"/>
+          </a:p>
+        </p:txBody>
+      </p:sp>
+      <p:sp>
+        <p:nvSpPr>
+          <p:cNvPr id="3" name="Content Placeholder 2"/>
+          <p:cNvSpPr>
+            <a:spLocks noGrp="1"/>
+          </p:cNvSpPr>
+          <p:nvPr>
+            <p:ph sz="half" idx="1"/>
+          </p:nvPr>
+        </p:nvSpPr>
+        <p:spPr/>
+        <p:txBody>
+          <a:bodyPr/>
+          <a:lstStyle/>
+          <a:p>
+            <a:r>
+              <a:rPr lang="en-US" dirty="0" smtClean="0"/>
+              <a:t>Admin Profile</a:t>
+            </a:r>
+          </a:p>
+          <a:p>
+            <a:r>
+              <a:rPr lang="en-US" dirty="0" smtClean="0"/>
+              <a:t>Get Job Listing</a:t>
+            </a:r>
+          </a:p>
+          <a:p>
+            <a:r>
+              <a:rPr lang="en-US" dirty="0" smtClean="0"/>
+              <a:t>Get Company Info</a:t>
+            </a:r>
+          </a:p>
+          <a:p>
+            <a:r>
+              <a:rPr lang="en-US" dirty="0" smtClean="0"/>
+              <a:t>Get All Job Applications</a:t>
+            </a:r>
+          </a:p>
+          <a:p>
+            <a:r>
+              <a:rPr lang="en-US" dirty="0" smtClean="0"/>
+              <a:t>Logout</a:t>
+            </a:r>
+            <a:endParaRPr lang="en-US" dirty="0"/>
+          </a:p>
+        </p:txBody>
+      </p:sp>
+      <p:pic>
+        <p:nvPicPr>
+          <p:cNvPr id="5" name="Content Placeholder 4"/>
+          <p:cNvPicPr>
+            <a:picLocks noGrp="1" noChangeAspect="1"/>
+          </p:cNvPicPr>
+          <p:nvPr>
+            <p:ph sz="half" idx="2"/>
+          </p:nvPr>
+        </p:nvPicPr>
+        <p:blipFill>
+          <a:blip r:embed="rId2" cstate="print">
+            <a:extLst>
+              <a:ext uri="{28A0092B-C50C-407E-A947-70E740481C1C}">
+                <a14:useLocalDpi xmlns:a14="http://schemas.microsoft.com/office/drawing/2010/main" val="0"/>
+              </a:ext>
+            </a:extLst>
+          </a:blip>
+          <a:stretch>
+            <a:fillRect/>
+          </a:stretch>
+        </p:blipFill>
+        <p:spPr>
+          <a:xfrm>
+            <a:off x="6172200" y="1959428"/>
+            <a:ext cx="5181600" cy="3796937"/>
+          </a:xfrm>
+        </p:spPr>
+      </p:pic>
+    </p:spTree>
+    <p:extLst>
+      <p:ext uri="{BB962C8B-B14F-4D97-AF65-F5344CB8AC3E}">
+        <p14:creationId xmlns:p14="http://schemas.microsoft.com/office/powerpoint/2010/main" val="3149925569"/>
+      </p:ext>
+    </p:extLst>
+  </p:cSld>
+  <p:clrMapOvr>
+    <a:masterClrMapping/>
+  </p:clrMapOvr>
+</p:sld>
+</file>
+
+<file path=ppt/slides/slide11.xml><?xml version="1.0" encoding="utf-8"?>
+<p:sld xmlns:a="http://schemas.openxmlformats.org/drawingml/2006/main" xmlns:r="http://schemas.openxmlformats.org/officeDocument/2006/relationships" xmlns:p="http://schemas.openxmlformats.org/presentationml/2006/main">
+  <p:cSld>
+    <p:spTree>
+      <p:nvGrpSpPr>
+        <p:cNvPr id="1" name=""/>
+        <p:cNvGrpSpPr/>
+        <p:nvPr/>
+      </p:nvGrpSpPr>
+      <p:grpSpPr>
+        <a:xfrm>
+          <a:off x="0" y="0"/>
+          <a:ext cx="0" cy="0"/>
+          <a:chOff x="0" y="0"/>
+          <a:chExt cx="0" cy="0"/>
+        </a:xfrm>
+      </p:grpSpPr>
+      <p:sp>
+        <p:nvSpPr>
+          <p:cNvPr id="2" name="Title 1"/>
+          <p:cNvSpPr>
+            <a:spLocks noGrp="1"/>
+          </p:cNvSpPr>
+          <p:nvPr>
+            <p:ph type="title"/>
+          </p:nvPr>
+        </p:nvSpPr>
+        <p:spPr/>
+        <p:txBody>
+          <a:bodyPr>
+            <a:normAutofit fontScale="90000"/>
+          </a:bodyPr>
+          <a:lstStyle/>
+          <a:p>
+            <a:r>
+              <a:rPr lang="en-US" b="1" dirty="0" smtClean="0"/>
+              <a:t>               </a:t>
+            </a:r>
+            <a:br>
+              <a:rPr lang="en-US" b="1" dirty="0" smtClean="0"/>
+            </a:br>
+            <a:r>
+              <a:rPr lang="en-US" b="1" dirty="0"/>
+              <a:t> </a:t>
+            </a:r>
+            <a:r>
+              <a:rPr lang="en-US" b="1" dirty="0" smtClean="0"/>
+              <a:t>                         Admin </a:t>
+            </a:r>
+            <a:r>
+              <a:rPr lang="en-US" b="1" dirty="0"/>
+              <a:t>Profile</a:t>
+            </a:r>
+            <a:r>
+              <a:rPr lang="en-US" dirty="0"/>
+              <a:t/>
+            </a:r>
+            <a:br>
+              <a:rPr lang="en-US" dirty="0"/>
+            </a:br>
+            <a:endParaRPr lang="en-US" dirty="0"/>
+          </a:p>
+        </p:txBody>
+      </p:sp>
+      <p:sp>
+        <p:nvSpPr>
+          <p:cNvPr id="3" name="Content Placeholder 2"/>
+          <p:cNvSpPr>
+            <a:spLocks noGrp="1"/>
+          </p:cNvSpPr>
+          <p:nvPr>
+            <p:ph sz="half" idx="1"/>
+          </p:nvPr>
+        </p:nvSpPr>
+        <p:spPr/>
+        <p:txBody>
+          <a:bodyPr/>
+          <a:lstStyle/>
+          <a:p>
+            <a:r>
+              <a:rPr lang="en-US" dirty="0"/>
+              <a:t>The </a:t>
+            </a:r>
+            <a:r>
+              <a:rPr lang="en-US" dirty="0" smtClean="0"/>
+              <a:t>admin </a:t>
+            </a:r>
+            <a:r>
+              <a:rPr lang="en-US" dirty="0"/>
+              <a:t>profile section allows </a:t>
+            </a:r>
+            <a:r>
+              <a:rPr lang="en-US" dirty="0" smtClean="0"/>
+              <a:t>admin </a:t>
+            </a:r>
+            <a:r>
+              <a:rPr lang="en-US" dirty="0"/>
+              <a:t>to view their details and profile picture, and provides an option to update them.</a:t>
+            </a:r>
+          </a:p>
+          <a:p>
+            <a:endParaRPr lang="en-US" dirty="0"/>
+          </a:p>
+        </p:txBody>
+      </p:sp>
+      <p:pic>
+        <p:nvPicPr>
+          <p:cNvPr id="5" name="Content Placeholder 4"/>
+          <p:cNvPicPr>
+            <a:picLocks noGrp="1" noChangeAspect="1"/>
+          </p:cNvPicPr>
+          <p:nvPr>
+            <p:ph sz="half" idx="2"/>
+          </p:nvPr>
+        </p:nvPicPr>
+        <p:blipFill>
+          <a:blip r:embed="rId2" cstate="print">
+            <a:extLst>
+              <a:ext uri="{28A0092B-C50C-407E-A947-70E740481C1C}">
+                <a14:useLocalDpi xmlns:a14="http://schemas.microsoft.com/office/drawing/2010/main" val="0"/>
+              </a:ext>
+            </a:extLst>
+          </a:blip>
+          <a:stretch>
+            <a:fillRect/>
+          </a:stretch>
+        </p:blipFill>
+        <p:spPr>
+          <a:xfrm>
+            <a:off x="6172200" y="1889760"/>
+            <a:ext cx="5181600" cy="3805646"/>
+          </a:xfrm>
+        </p:spPr>
+      </p:pic>
+    </p:spTree>
+    <p:extLst>
+      <p:ext uri="{BB962C8B-B14F-4D97-AF65-F5344CB8AC3E}">
+        <p14:creationId xmlns:p14="http://schemas.microsoft.com/office/powerpoint/2010/main" val="2969187517"/>
+      </p:ext>
+    </p:extLst>
+  </p:cSld>
+  <p:clrMapOvr>
+    <a:masterClrMapping/>
+  </p:clrMapOvr>
+</p:sld>
+</file>
+
+<file path=ppt/slides/slide12.xml><?xml version="1.0" encoding="utf-8"?>
+<p:sld xmlns:a="http://schemas.openxmlformats.org/drawingml/2006/main" xmlns:r="http://schemas.openxmlformats.org/officeDocument/2006/relationships" xmlns:p="http://schemas.openxmlformats.org/presentationml/2006/main">
+  <p:cSld>
+    <p:spTree>
+      <p:nvGrpSpPr>
+        <p:cNvPr id="1" name=""/>
+        <p:cNvGrpSpPr/>
+        <p:nvPr/>
+      </p:nvGrpSpPr>
+      <p:grpSpPr>
+        <a:xfrm>
+          <a:off x="0" y="0"/>
+          <a:ext cx="0" cy="0"/>
+          <a:chOff x="0" y="0"/>
+          <a:chExt cx="0" cy="0"/>
+        </a:xfrm>
+      </p:grpSpPr>
+      <p:sp>
+        <p:nvSpPr>
+          <p:cNvPr id="2" name="Title 1"/>
+          <p:cNvSpPr>
+            <a:spLocks noGrp="1"/>
+          </p:cNvSpPr>
+          <p:nvPr>
+            <p:ph type="title"/>
+          </p:nvPr>
+        </p:nvSpPr>
+        <p:spPr/>
+        <p:txBody>
+          <a:bodyPr>
+            <a:normAutofit fontScale="90000"/>
+          </a:bodyPr>
+          <a:lstStyle/>
+          <a:p>
+            <a:r>
+              <a:rPr lang="en-US" dirty="0" smtClean="0"/>
+              <a:t/>
+            </a:r>
+            <a:br>
+              <a:rPr lang="en-US" dirty="0" smtClean="0"/>
+            </a:br>
+            <a:r>
+              <a:rPr lang="en-US" b="1" dirty="0"/>
+              <a:t> </a:t>
+            </a:r>
+            <a:r>
+              <a:rPr lang="en-US" b="1" dirty="0" smtClean="0"/>
+              <a:t>                   Get </a:t>
+            </a:r>
+            <a:r>
+              <a:rPr lang="en-US" b="1" dirty="0"/>
+              <a:t>Company Info</a:t>
+            </a:r>
+            <a:r>
+              <a:rPr lang="en-US" dirty="0"/>
+              <a:t/>
+            </a:r>
+            <a:br>
+              <a:rPr lang="en-US" dirty="0"/>
+            </a:br>
+            <a:endParaRPr lang="en-US" dirty="0"/>
+          </a:p>
+        </p:txBody>
+      </p:sp>
+      <p:sp>
+        <p:nvSpPr>
+          <p:cNvPr id="3" name="Content Placeholder 2"/>
+          <p:cNvSpPr>
+            <a:spLocks noGrp="1"/>
+          </p:cNvSpPr>
+          <p:nvPr>
+            <p:ph sz="half" idx="1"/>
+          </p:nvPr>
+        </p:nvSpPr>
+        <p:spPr/>
+        <p:txBody>
+          <a:bodyPr/>
+          <a:lstStyle/>
+          <a:p>
+            <a:r>
+              <a:rPr lang="en-US" dirty="0" smtClean="0"/>
+              <a:t>Admin allows to add his own company information </a:t>
+            </a:r>
+          </a:p>
+          <a:p>
+            <a:endParaRPr lang="en-US" dirty="0"/>
+          </a:p>
+        </p:txBody>
+      </p:sp>
+      <p:pic>
+        <p:nvPicPr>
+          <p:cNvPr id="5" name="Content Placeholder 4"/>
+          <p:cNvPicPr>
+            <a:picLocks noGrp="1" noChangeAspect="1"/>
+          </p:cNvPicPr>
+          <p:nvPr>
+            <p:ph sz="half" idx="2"/>
+          </p:nvPr>
+        </p:nvPicPr>
+        <p:blipFill>
+          <a:blip r:embed="rId2" cstate="print">
+            <a:extLst>
+              <a:ext uri="{28A0092B-C50C-407E-A947-70E740481C1C}">
+                <a14:useLocalDpi xmlns:a14="http://schemas.microsoft.com/office/drawing/2010/main" val="0"/>
+              </a:ext>
+            </a:extLst>
+          </a:blip>
+          <a:stretch>
+            <a:fillRect/>
+          </a:stretch>
+        </p:blipFill>
+        <p:spPr>
+          <a:xfrm>
+            <a:off x="7059969" y="1262744"/>
+            <a:ext cx="4737968" cy="2325188"/>
+          </a:xfrm>
+        </p:spPr>
+      </p:pic>
+      <p:pic>
+        <p:nvPicPr>
+          <p:cNvPr id="6" name="Picture 5"/>
+          <p:cNvPicPr>
+            <a:picLocks noChangeAspect="1"/>
+          </p:cNvPicPr>
+          <p:nvPr/>
+        </p:nvPicPr>
+        <p:blipFill>
+          <a:blip r:embed="rId3" cstate="print">
+            <a:extLst>
+              <a:ext uri="{28A0092B-C50C-407E-A947-70E740481C1C}">
+                <a14:useLocalDpi xmlns:a14="http://schemas.microsoft.com/office/drawing/2010/main" val="0"/>
+              </a:ext>
+            </a:extLst>
+          </a:blip>
+          <a:stretch>
+            <a:fillRect/>
+          </a:stretch>
+        </p:blipFill>
+        <p:spPr>
+          <a:xfrm>
+            <a:off x="766354" y="2795451"/>
+            <a:ext cx="5947955" cy="3762103"/>
+          </a:xfrm>
+          <a:prstGeom prst="rect">
+            <a:avLst/>
+          </a:prstGeom>
+        </p:spPr>
+      </p:pic>
+    </p:spTree>
+    <p:extLst>
+      <p:ext uri="{BB962C8B-B14F-4D97-AF65-F5344CB8AC3E}">
+        <p14:creationId xmlns:p14="http://schemas.microsoft.com/office/powerpoint/2010/main" val="3995036718"/>
+      </p:ext>
+    </p:extLst>
+  </p:cSld>
+  <p:clrMapOvr>
+    <a:masterClrMapping/>
+  </p:clrMapOvr>
+</p:sld>
+</file>
+
+<file path=ppt/slides/slide13.xml><?xml version="1.0" encoding="utf-8"?>
+<p:sld xmlns:a="http://schemas.openxmlformats.org/drawingml/2006/main" xmlns:r="http://schemas.openxmlformats.org/officeDocument/2006/relationships" xmlns:p="http://schemas.openxmlformats.org/presentationml/2006/main">
+  <p:cSld>
+    <p:spTree>
+      <p:nvGrpSpPr>
+        <p:cNvPr id="1" name=""/>
+        <p:cNvGrpSpPr/>
+        <p:nvPr/>
+      </p:nvGrpSpPr>
+      <p:grpSpPr>
+        <a:xfrm>
+          <a:off x="0" y="0"/>
+          <a:ext cx="0" cy="0"/>
+          <a:chOff x="0" y="0"/>
+          <a:chExt cx="0" cy="0"/>
+        </a:xfrm>
+      </p:grpSpPr>
+      <p:sp>
+        <p:nvSpPr>
+          <p:cNvPr id="2" name="Title 1"/>
+          <p:cNvSpPr>
+            <a:spLocks noGrp="1"/>
+          </p:cNvSpPr>
+          <p:nvPr>
+            <p:ph type="title"/>
+          </p:nvPr>
+        </p:nvSpPr>
+        <p:spPr/>
+        <p:txBody>
+          <a:bodyPr/>
+          <a:lstStyle/>
+          <a:p>
+            <a:r>
+              <a:rPr lang="en-US" dirty="0" smtClean="0"/>
+              <a:t>Admin Allow to add job</a:t>
+            </a:r>
+            <a:endParaRPr lang="en-US" dirty="0"/>
+          </a:p>
+        </p:txBody>
+      </p:sp>
+      <p:pic>
+        <p:nvPicPr>
+          <p:cNvPr id="5" name="Content Placeholder 4"/>
+          <p:cNvPicPr>
+            <a:picLocks noGrp="1" noChangeAspect="1"/>
+          </p:cNvPicPr>
+          <p:nvPr>
+            <p:ph sz="half" idx="1"/>
+          </p:nvPr>
+        </p:nvPicPr>
+        <p:blipFill>
+          <a:blip r:embed="rId2" cstate="print">
+            <a:extLst>
+              <a:ext uri="{28A0092B-C50C-407E-A947-70E740481C1C}">
+                <a14:useLocalDpi xmlns:a14="http://schemas.microsoft.com/office/drawing/2010/main" val="0"/>
+              </a:ext>
+            </a:extLst>
+          </a:blip>
+          <a:stretch>
+            <a:fillRect/>
+          </a:stretch>
+        </p:blipFill>
+        <p:spPr>
+          <a:xfrm>
+            <a:off x="838200" y="2055223"/>
+            <a:ext cx="5181600" cy="3229923"/>
+          </a:xfrm>
+        </p:spPr>
+      </p:pic>
+      <p:pic>
+        <p:nvPicPr>
+          <p:cNvPr id="6" name="Content Placeholder 5"/>
+          <p:cNvPicPr>
+            <a:picLocks noGrp="1" noChangeAspect="1"/>
+          </p:cNvPicPr>
+          <p:nvPr>
+            <p:ph sz="half" idx="2"/>
+          </p:nvPr>
+        </p:nvPicPr>
+        <p:blipFill>
+          <a:blip r:embed="rId3" cstate="print">
+            <a:extLst>
+              <a:ext uri="{28A0092B-C50C-407E-A947-70E740481C1C}">
+                <a14:useLocalDpi xmlns:a14="http://schemas.microsoft.com/office/drawing/2010/main" val="0"/>
+              </a:ext>
+            </a:extLst>
+          </a:blip>
+          <a:stretch>
+            <a:fillRect/>
+          </a:stretch>
+        </p:blipFill>
+        <p:spPr>
+          <a:xfrm>
+            <a:off x="6348548" y="1532709"/>
+            <a:ext cx="5005251" cy="3755777"/>
+          </a:xfrm>
+        </p:spPr>
+      </p:pic>
+    </p:spTree>
+    <p:extLst>
+      <p:ext uri="{BB962C8B-B14F-4D97-AF65-F5344CB8AC3E}">
+        <p14:creationId xmlns:p14="http://schemas.microsoft.com/office/powerpoint/2010/main" val="2441492686"/>
+      </p:ext>
+    </p:extLst>
+  </p:cSld>
+  <p:clrMapOvr>
+    <a:masterClrMapping/>
+  </p:clrMapOvr>
+</p:sld>
+</file>
+
+<file path=ppt/slides/slide2.xml><?xml version="1.0" encoding="utf-8"?>
 <p:sld xmlns:a="http://schemas.openxmlformats.org/drawingml/2006/main" xmlns:r="http://schemas.openxmlformats.org/officeDocument/2006/relationships" xmlns:p="http://schemas.openxmlformats.org/presentationml/2006/main">
   <p:cSld>
     <p:spTree>
@@ -3248,7 +3737,7 @@
 </p:sld>
 </file>
 
-<file path=ppt/slides/slide4.xml><?xml version="1.0" encoding="utf-8"?>
+<file path=ppt/slides/slide3.xml><?xml version="1.0" encoding="utf-8"?>
 <p:sld xmlns:a="http://schemas.openxmlformats.org/drawingml/2006/main" xmlns:r="http://schemas.openxmlformats.org/officeDocument/2006/relationships" xmlns:p="http://schemas.openxmlformats.org/presentationml/2006/main">
   <p:cSld>
     <p:spTree>
@@ -3398,7 +3887,7 @@
 </p:sld>
 </file>
 
-<file path=ppt/slides/slide5.xml><?xml version="1.0" encoding="utf-8"?>
+<file path=ppt/slides/slide4.xml><?xml version="1.0" encoding="utf-8"?>
 <p:sld xmlns:a="http://schemas.openxmlformats.org/drawingml/2006/main" xmlns:r="http://schemas.openxmlformats.org/officeDocument/2006/relationships" xmlns:p="http://schemas.openxmlformats.org/presentationml/2006/main">
   <p:cSld>
     <p:spTree>
@@ -3510,7 +3999,7 @@
 </p:sld>
 </file>
 
-<file path=ppt/slides/slide6.xml><?xml version="1.0" encoding="utf-8"?>
+<file path=ppt/slides/slide5.xml><?xml version="1.0" encoding="utf-8"?>
 <p:sld xmlns:a="http://schemas.openxmlformats.org/drawingml/2006/main" xmlns:r="http://schemas.openxmlformats.org/officeDocument/2006/relationships" xmlns:p="http://schemas.openxmlformats.org/presentationml/2006/main">
   <p:cSld>
     <p:spTree>
@@ -3656,7 +4145,7 @@
 </p:sld>
 </file>
 
-<file path=ppt/slides/slide7.xml><?xml version="1.0" encoding="utf-8"?>
+<file path=ppt/slides/slide6.xml><?xml version="1.0" encoding="utf-8"?>
 <p:sld xmlns:a="http://schemas.openxmlformats.org/drawingml/2006/main" xmlns:r="http://schemas.openxmlformats.org/officeDocument/2006/relationships" xmlns:p="http://schemas.openxmlformats.org/presentationml/2006/main">
   <p:cSld>
     <p:spTree>
@@ -3771,7 +4260,7 @@
 </p:sld>
 </file>
 
-<file path=ppt/slides/slide8.xml><?xml version="1.0" encoding="utf-8"?>
+<file path=ppt/slides/slide7.xml><?xml version="1.0" encoding="utf-8"?>
 <p:sld xmlns:a="http://schemas.openxmlformats.org/drawingml/2006/main" xmlns:r="http://schemas.openxmlformats.org/officeDocument/2006/relationships" xmlns:p="http://schemas.openxmlformats.org/presentationml/2006/main">
   <p:cSld>
     <p:spTree>
@@ -3977,7 +4466,7 @@
 </p:sld>
 </file>
 
-<file path=ppt/slides/slide9.xml><?xml version="1.0" encoding="utf-8"?>
+<file path=ppt/slides/slide8.xml><?xml version="1.0" encoding="utf-8"?>
 <p:sld xmlns:a="http://schemas.openxmlformats.org/drawingml/2006/main" xmlns:r="http://schemas.openxmlformats.org/officeDocument/2006/relationships" xmlns:p="http://schemas.openxmlformats.org/presentationml/2006/main">
   <p:cSld>
     <p:spTree>
@@ -4011,15 +4500,7 @@
           <a:p>
             <a:r>
               <a:rPr lang="en-US" dirty="0" smtClean="0"/>
-              <a:t> </a:t>
-            </a:r>
-            <a:r>
-              <a:rPr lang="en-US" dirty="0" smtClean="0"/>
-              <a:t>U</a:t>
-            </a:r>
-            <a:r>
-              <a:rPr lang="en-US" dirty="0" smtClean="0"/>
-              <a:t>ser  Can Track Job</a:t>
+              <a:t> User  Can Track Job</a:t>
             </a:r>
             <a:br>
               <a:rPr lang="en-US" dirty="0" smtClean="0"/>
@@ -4090,6 +4571,88 @@
     <p:extLst>
       <p:ext uri="{BB962C8B-B14F-4D97-AF65-F5344CB8AC3E}">
         <p14:creationId xmlns:p14="http://schemas.microsoft.com/office/powerpoint/2010/main" val="1622946465"/>
+      </p:ext>
+    </p:extLst>
+  </p:cSld>
+  <p:clrMapOvr>
+    <a:masterClrMapping/>
+  </p:clrMapOvr>
+</p:sld>
+</file>
+
+<file path=ppt/slides/slide9.xml><?xml version="1.0" encoding="utf-8"?>
+<p:sld xmlns:a="http://schemas.openxmlformats.org/drawingml/2006/main" xmlns:r="http://schemas.openxmlformats.org/officeDocument/2006/relationships" xmlns:p="http://schemas.openxmlformats.org/presentationml/2006/main">
+  <p:cSld>
+    <p:spTree>
+      <p:nvGrpSpPr>
+        <p:cNvPr id="1" name=""/>
+        <p:cNvGrpSpPr/>
+        <p:nvPr/>
+      </p:nvGrpSpPr>
+      <p:grpSpPr>
+        <a:xfrm>
+          <a:off x="0" y="0"/>
+          <a:ext cx="0" cy="0"/>
+          <a:chOff x="0" y="0"/>
+          <a:chExt cx="0" cy="0"/>
+        </a:xfrm>
+      </p:grpSpPr>
+      <p:sp>
+        <p:nvSpPr>
+          <p:cNvPr id="2" name="Title 1"/>
+          <p:cNvSpPr>
+            <a:spLocks noGrp="1"/>
+          </p:cNvSpPr>
+          <p:nvPr>
+            <p:ph type="title"/>
+          </p:nvPr>
+        </p:nvSpPr>
+        <p:spPr/>
+        <p:txBody>
+          <a:bodyPr/>
+          <a:lstStyle/>
+          <a:p>
+            <a:r>
+              <a:rPr lang="en-US" dirty="0" smtClean="0"/>
+              <a:t>Admin Register &amp; Login</a:t>
+            </a:r>
+            <a:endParaRPr lang="en-US" dirty="0"/>
+          </a:p>
+        </p:txBody>
+      </p:sp>
+      <p:pic>
+        <p:nvPicPr>
+          <p:cNvPr id="6" name="Content Placeholder 5"/>
+          <p:cNvPicPr>
+            <a:picLocks noGrp="1" noChangeAspect="1"/>
+          </p:cNvPicPr>
+          <p:nvPr>
+            <p:ph sz="half" idx="2"/>
+          </p:nvPr>
+        </p:nvPicPr>
+        <p:blipFill>
+          <a:blip r:embed="rId2" cstate="print">
+            <a:extLst>
+              <a:ext uri="{28A0092B-C50C-407E-A947-70E740481C1C}">
+                <a14:useLocalDpi xmlns:a14="http://schemas.microsoft.com/office/drawing/2010/main" val="0"/>
+              </a:ext>
+            </a:extLst>
+          </a:blip>
+          <a:stretch>
+            <a:fillRect/>
+          </a:stretch>
+        </p:blipFill>
+        <p:spPr>
+          <a:xfrm>
+            <a:off x="2514599" y="1828800"/>
+            <a:ext cx="6611983" cy="4206241"/>
+          </a:xfrm>
+        </p:spPr>
+      </p:pic>
+    </p:spTree>
+    <p:extLst>
+      <p:ext uri="{BB962C8B-B14F-4D97-AF65-F5344CB8AC3E}">
+        <p14:creationId xmlns:p14="http://schemas.microsoft.com/office/powerpoint/2010/main" val="3974438351"/>
       </p:ext>
     </p:extLst>
   </p:cSld>
